--- a/samples/presentations/投资人更新-2026-06.pptx
+++ b/samples/presentations/投资人更新-2026-06.pptx
@@ -112,6 +112,324 @@
     </a:lvl9pPr>
   </p:defaultTextStyle>
 </p:presentation>
+</file>
+
+<file path=ppt/charts/chart1.xml><?xml version="1.0" encoding="utf-8"?>
+<c:chartSpace xmlns:c="http://schemas.openxmlformats.org/drawingml/2006/chart" xmlns:a="http://schemas.openxmlformats.org/drawingml/2006/main" xmlns:r="http://schemas.openxmlformats.org/officeDocument/2006/relationships">
+  <c:date1904 val="0"/>
+  <c:chart>
+    <c:autoTitleDeleted val="0"/>
+    <c:plotArea>
+      <c:barChart>
+        <c:barDir val="col"/>
+        <c:grouping val="clustered"/>
+        <c:ser>
+          <c:idx val="0"/>
+          <c:order val="0"/>
+          <c:tx>
+            <c:strRef>
+              <c:f>Sheet1!$B$1</c:f>
+              <c:strCache>
+                <c:ptCount val="1"/>
+                <c:pt idx="0">
+                  <c:v>注册用户</c:v>
+                </c:pt>
+              </c:strCache>
+            </c:strRef>
+          </c:tx>
+          <c:cat>
+            <c:strRef>
+              <c:f>Sheet1!$A$2:$A$7</c:f>
+              <c:strCache>
+                <c:ptCount val="6"/>
+                <c:pt idx="0">
+                  <c:v>7 月</c:v>
+                </c:pt>
+                <c:pt idx="1">
+                  <c:v>8 月</c:v>
+                </c:pt>
+                <c:pt idx="2">
+                  <c:v>9 月</c:v>
+                </c:pt>
+                <c:pt idx="3">
+                  <c:v>10 月</c:v>
+                </c:pt>
+                <c:pt idx="4">
+                  <c:v>11 月</c:v>
+                </c:pt>
+                <c:pt idx="5">
+                  <c:v>12 月</c:v>
+                </c:pt>
+              </c:strCache>
+            </c:strRef>
+          </c:cat>
+          <c:val>
+            <c:numRef>
+              <c:f>Sheet1!$B$2:$B$7</c:f>
+              <c:numCache>
+                <c:formatCode>General</c:formatCode>
+                <c:ptCount val="6"/>
+                <c:pt idx="0">
+                  <c:v>100</c:v>
+                </c:pt>
+                <c:pt idx="1">
+                  <c:v>500</c:v>
+                </c:pt>
+                <c:pt idx="2">
+                  <c:v>1500</c:v>
+                </c:pt>
+                <c:pt idx="3">
+                  <c:v>3000</c:v>
+                </c:pt>
+                <c:pt idx="4">
+                  <c:v>5000</c:v>
+                </c:pt>
+                <c:pt idx="5">
+                  <c:v>8000</c:v>
+                </c:pt>
+              </c:numCache>
+            </c:numRef>
+          </c:val>
+        </c:ser>
+        <c:ser>
+          <c:idx val="1"/>
+          <c:order val="1"/>
+          <c:tx>
+            <c:strRef>
+              <c:f>Sheet1!$C$1</c:f>
+              <c:strCache>
+                <c:ptCount val="1"/>
+                <c:pt idx="0">
+                  <c:v>付费用户</c:v>
+                </c:pt>
+              </c:strCache>
+            </c:strRef>
+          </c:tx>
+          <c:cat>
+            <c:strRef>
+              <c:f>Sheet1!$A$2:$A$7</c:f>
+              <c:strCache>
+                <c:ptCount val="6"/>
+                <c:pt idx="0">
+                  <c:v>7 月</c:v>
+                </c:pt>
+                <c:pt idx="1">
+                  <c:v>8 月</c:v>
+                </c:pt>
+                <c:pt idx="2">
+                  <c:v>9 月</c:v>
+                </c:pt>
+                <c:pt idx="3">
+                  <c:v>10 月</c:v>
+                </c:pt>
+                <c:pt idx="4">
+                  <c:v>11 月</c:v>
+                </c:pt>
+                <c:pt idx="5">
+                  <c:v>12 月</c:v>
+                </c:pt>
+              </c:strCache>
+            </c:strRef>
+          </c:cat>
+          <c:val>
+            <c:numRef>
+              <c:f>Sheet1!$C$2:$C$7</c:f>
+              <c:numCache>
+                <c:formatCode>General</c:formatCode>
+                <c:ptCount val="6"/>
+                <c:pt idx="0">
+                  <c:v>5</c:v>
+                </c:pt>
+                <c:pt idx="1">
+                  <c:v>25</c:v>
+                </c:pt>
+                <c:pt idx="2">
+                  <c:v>75</c:v>
+                </c:pt>
+                <c:pt idx="3">
+                  <c:v>150</c:v>
+                </c:pt>
+                <c:pt idx="4">
+                  <c:v>250</c:v>
+                </c:pt>
+                <c:pt idx="5">
+                  <c:v>400</c:v>
+                </c:pt>
+              </c:numCache>
+            </c:numRef>
+          </c:val>
+        </c:ser>
+        <c:axId val="-2068027336"/>
+        <c:axId val="-2113994440"/>
+      </c:barChart>
+      <c:catAx>
+        <c:axId val="-2068027336"/>
+        <c:scaling>
+          <c:orientation val="minMax"/>
+        </c:scaling>
+        <c:delete val="0"/>
+        <c:axPos val="b"/>
+        <c:majorTickMark val="out"/>
+        <c:minorTickMark val="none"/>
+        <c:tickLblPos val="nextTo"/>
+        <c:crossAx val="-2113994440"/>
+        <c:crosses val="autoZero"/>
+        <c:auto val="1"/>
+        <c:lblAlgn val="ctr"/>
+        <c:lblOffset val="100"/>
+        <c:noMultiLvlLbl val="0"/>
+      </c:catAx>
+      <c:valAx>
+        <c:axId val="-2113994440"/>
+        <c:scaling/>
+        <c:delete val="0"/>
+        <c:axPos val="l"/>
+        <c:majorGridlines/>
+        <c:majorTickMark val="out"/>
+        <c:minorTickMark val="none"/>
+        <c:tickLblPos val="nextTo"/>
+        <c:crossAx val="-2068027336"/>
+        <c:crosses val="autoZero"/>
+      </c:valAx>
+    </c:plotArea>
+    <c:legend>
+      <c:overlay val="0"/>
+    </c:legend>
+    <c:dispBlanksAs val="gap"/>
+  </c:chart>
+  <c:txPr>
+    <a:bodyPr/>
+    <a:lstStyle/>
+    <a:p>
+      <a:pPr>
+        <a:defRPr sz="1800"/>
+      </a:pPr>
+      <a:endParaRPr lang="en-US"/>
+    </a:p>
+  </c:txPr>
+  <c:externalData r:id="rId1">
+    <c:autoUpdate val="0"/>
+  </c:externalData>
+</c:chartSpace>
+</file>
+
+<file path=ppt/charts/chart2.xml><?xml version="1.0" encoding="utf-8"?>
+<c:chartSpace xmlns:c="http://schemas.openxmlformats.org/drawingml/2006/chart" xmlns:a="http://schemas.openxmlformats.org/drawingml/2006/main" xmlns:r="http://schemas.openxmlformats.org/officeDocument/2006/relationships">
+  <c:date1904 val="0"/>
+  <c:chart>
+    <c:autoTitleDeleted val="0"/>
+    <c:plotArea>
+      <c:barChart>
+        <c:barDir val="col"/>
+        <c:grouping val="clustered"/>
+        <c:ser>
+          <c:idx val="0"/>
+          <c:order val="0"/>
+          <c:tx>
+            <c:strRef>
+              <c:f>Sheet1!$B$1</c:f>
+              <c:strCache>
+                <c:ptCount val="1"/>
+                <c:pt idx="0">
+                  <c:v>ARR ($M)</c:v>
+                </c:pt>
+              </c:strCache>
+            </c:strRef>
+          </c:tx>
+          <c:cat>
+            <c:strRef>
+              <c:f>Sheet1!$A$2:$A$5</c:f>
+              <c:strCache>
+                <c:ptCount val="4"/>
+                <c:pt idx="0">
+                  <c:v>2026 Q3</c:v>
+                </c:pt>
+                <c:pt idx="1">
+                  <c:v>2026 Q4</c:v>
+                </c:pt>
+                <c:pt idx="2">
+                  <c:v>2027 Q1</c:v>
+                </c:pt>
+                <c:pt idx="3">
+                  <c:v>2027 Q2</c:v>
+                </c:pt>
+              </c:strCache>
+            </c:strRef>
+          </c:cat>
+          <c:val>
+            <c:numRef>
+              <c:f>Sheet1!$B$2:$B$5</c:f>
+              <c:numCache>
+                <c:formatCode>General</c:formatCode>
+                <c:ptCount val="4"/>
+                <c:pt idx="0">
+                  <c:v>1.29</c:v>
+                </c:pt>
+                <c:pt idx="1">
+                  <c:v>3.5</c:v>
+                </c:pt>
+                <c:pt idx="2">
+                  <c:v>6.5</c:v>
+                </c:pt>
+                <c:pt idx="3">
+                  <c:v>10</c:v>
+                </c:pt>
+              </c:numCache>
+            </c:numRef>
+          </c:val>
+        </c:ser>
+        <c:axId val="-2068027336"/>
+        <c:axId val="-2113994440"/>
+      </c:barChart>
+      <c:catAx>
+        <c:axId val="-2068027336"/>
+        <c:scaling>
+          <c:orientation val="minMax"/>
+        </c:scaling>
+        <c:delete val="0"/>
+        <c:axPos val="b"/>
+        <c:majorTickMark val="out"/>
+        <c:minorTickMark val="none"/>
+        <c:tickLblPos val="nextTo"/>
+        <c:crossAx val="-2113994440"/>
+        <c:crosses val="autoZero"/>
+        <c:auto val="1"/>
+        <c:lblAlgn val="ctr"/>
+        <c:lblOffset val="100"/>
+        <c:noMultiLvlLbl val="0"/>
+      </c:catAx>
+      <c:valAx>
+        <c:axId val="-2113994440"/>
+        <c:scaling/>
+        <c:delete val="0"/>
+        <c:axPos val="l"/>
+        <c:majorGridlines/>
+        <c:majorTickMark val="out"/>
+        <c:minorTickMark val="none"/>
+        <c:tickLblPos val="nextTo"/>
+        <c:crossAx val="-2068027336"/>
+        <c:crosses val="autoZero"/>
+      </c:valAx>
+    </c:plotArea>
+    <c:legend>
+      <c:overlay val="0"/>
+    </c:legend>
+    <c:dispBlanksAs val="gap"/>
+  </c:chart>
+  <c:txPr>
+    <a:bodyPr/>
+    <a:lstStyle/>
+    <a:p>
+      <a:pPr>
+        <a:defRPr sz="1800"/>
+      </a:pPr>
+      <a:endParaRPr lang="en-US"/>
+    </a:p>
+  </c:txPr>
+  <c:externalData r:id="rId1">
+    <c:autoUpdate val="0"/>
+  </c:externalData>
+</c:chartSpace>
 </file>
 
 <file path=ppt/slideLayouts/slideLayout1.xml><?xml version="1.0" encoding="utf-8"?>
@@ -3538,16 +3856,34 @@
           </a:p>
         </p:txBody>
       </p:sp>
-      <p:sp>
-        <p:nvSpPr>
-          <p:cNvPr id="3" name="TextBox 2"/>
+      <p:graphicFrame>
+        <p:nvGraphicFramePr>
+          <p:cNvPr id="3" name="Chart 2"/>
+          <p:cNvGraphicFramePr>
+            <a:graphicFrameLocks noGrp="1"/>
+          </p:cNvGraphicFramePr>
+          <p:nvPr/>
+        </p:nvGraphicFramePr>
+        <p:xfrm>
+          <a:off x="914400" y="1371600"/>
+          <a:ext cx="5486400" cy="4572000"/>
+        </p:xfrm>
+        <a:graphic>
+          <a:graphicData uri="http://schemas.openxmlformats.org/drawingml/2006/chart">
+            <c:chart xmlns:c="http://schemas.openxmlformats.org/drawingml/2006/chart" r:id="rId2"/>
+          </a:graphicData>
+        </a:graphic>
+      </p:graphicFrame>
+      <p:sp>
+        <p:nvSpPr>
+          <p:cNvPr id="4" name="TextBox 3"/>
           <p:cNvSpPr txBox="1"/>
           <p:nvPr/>
         </p:nvSpPr>
         <p:spPr>
           <a:xfrm>
-            <a:off x="914400" y="1828800"/>
-            <a:ext cx="10058400" cy="3657600"/>
+            <a:off x="7315200" y="1828800"/>
+            <a:ext cx="3657600" cy="3657600"/>
           </a:xfrm>
           <a:prstGeom prst="rect">
             <a:avLst/>
@@ -3563,8 +3899,8 @@
           <a:p>
             <a:pPr algn="l"/>
             <a:r>
-              <a:t>市场规模：$4.2B（2026 年）</a:t>
-              <a:rPr sz="2000">
+              <a:t>NPS: 8.0/10</a:t>
+              <a:rPr sz="1800">
                 <a:solidFill>
                   <a:srgbClr val="333333"/>
                 </a:solidFill>
@@ -3577,8 +3913,8 @@
           <a:p>
             <a:pPr algn="l"/>
             <a:r>
-              <a:t>年增长率：28%（2026-2030）</a:t>
-              <a:rPr sz="2000">
+              <a:t>意向客户：</a:t>
+              <a:rPr sz="1800">
                 <a:solidFill>
                   <a:srgbClr val="333333"/>
                 </a:solidFill>
@@ -3591,8 +3927,8 @@
           <a:p>
             <a:pPr algn="l"/>
             <a:r>
-              <a:t>目标市场：$420M（10% 市场份额）</a:t>
-              <a:rPr sz="2000">
+              <a:t>Acme Corp</a:t>
+              <a:rPr sz="1800">
                 <a:solidFill>
                   <a:srgbClr val="333333"/>
                 </a:solidFill>
@@ -3605,8 +3941,8 @@
           <a:p>
             <a:pPr algn="l"/>
             <a:r>
-              <a:t/>
-              <a:rPr sz="2000">
+              <a:t>200 人</a:t>
+              <a:rPr sz="1800">
                 <a:solidFill>
                   <a:srgbClr val="333333"/>
                 </a:solidFill>
@@ -3619,22 +3955,8 @@
           <a:p>
             <a:pPr algn="l"/>
             <a:r>
-              <a:t>Beta 用户 NPS: 8.0/10</a:t>
-              <a:rPr sz="2000">
-                <a:solidFill>
-                  <a:srgbClr val="333333"/>
-                </a:solidFill>
-                <a:latin typeface="Helvetica Neue"/>
-                <a:ea typeface="PingFang SC"/>
-                <a:cs typeface="PingFang SC"/>
-              </a:rPr>
-            </a:r>
-          </a:p>
-          <a:p>
-            <a:pPr algn="l"/>
-            <a:r>
-              <a:t>意向客户：Acme Corp（200 人，$117,600/年）</a:t>
-              <a:rPr sz="2000">
+              <a:t>$117,600/年</a:t>
+              <a:rPr sz="1800">
                 <a:solidFill>
                   <a:srgbClr val="333333"/>
                 </a:solidFill>
@@ -4066,16 +4388,34 @@
           </a:p>
         </p:txBody>
       </p:sp>
-      <p:sp>
-        <p:nvSpPr>
-          <p:cNvPr id="3" name="TextBox 2"/>
+      <p:graphicFrame>
+        <p:nvGraphicFramePr>
+          <p:cNvPr id="3" name="Chart 2"/>
+          <p:cNvGraphicFramePr>
+            <a:graphicFrameLocks noGrp="1"/>
+          </p:cNvGraphicFramePr>
+          <p:nvPr/>
+        </p:nvGraphicFramePr>
+        <p:xfrm>
+          <a:off x="914400" y="1371600"/>
+          <a:ext cx="5486400" cy="4572000"/>
+        </p:xfrm>
+        <a:graphic>
+          <a:graphicData uri="http://schemas.openxmlformats.org/drawingml/2006/chart">
+            <c:chart xmlns:c="http://schemas.openxmlformats.org/drawingml/2006/chart" r:id="rId2"/>
+          </a:graphicData>
+        </a:graphic>
+      </p:graphicFrame>
+      <p:sp>
+        <p:nvSpPr>
+          <p:cNvPr id="4" name="TextBox 3"/>
           <p:cNvSpPr txBox="1"/>
           <p:nvPr/>
         </p:nvSpPr>
         <p:spPr>
           <a:xfrm>
-            <a:off x="914400" y="1828800"/>
-            <a:ext cx="10058400" cy="3657600"/>
+            <a:off x="7315200" y="1828800"/>
+            <a:ext cx="3657600" cy="3657600"/>
           </a:xfrm>
           <a:prstGeom prst="rect">
             <a:avLst/>
@@ -4091,8 +4431,8 @@
           <a:p>
             <a:pPr algn="l"/>
             <a:r>
-              <a:t>2026 Q3: $1.29M ARR（目标）</a:t>
-              <a:rPr sz="2000">
+              <a:t>烧钱率：$150K/月</a:t>
+              <a:rPr sz="1800">
                 <a:solidFill>
                   <a:srgbClr val="333333"/>
                 </a:solidFill>
@@ -4105,8 +4445,8 @@
           <a:p>
             <a:pPr algn="l"/>
             <a:r>
-              <a:t>2026 Q4: $3.5M ARR（目标）</a:t>
-              <a:rPr sz="2000">
+              <a:t>Runway：18 个月</a:t>
+              <a:rPr sz="1800">
                 <a:solidFill>
                   <a:srgbClr val="333333"/>
                 </a:solidFill>
@@ -4119,8 +4459,8 @@
           <a:p>
             <a:pPr algn="l"/>
             <a:r>
-              <a:t>2027 Q2: $10M ARR（目标）</a:t>
-              <a:rPr sz="2000">
+              <a:t/>
+              <a:rPr sz="1800">
                 <a:solidFill>
                   <a:srgbClr val="333333"/>
                 </a:solidFill>
@@ -4133,8 +4473,8 @@
           <a:p>
             <a:pPr algn="l"/>
             <a:r>
-              <a:t/>
-              <a:rPr sz="2000">
+              <a:t>盈亏平衡：</a:t>
+              <a:rPr sz="1800">
                 <a:solidFill>
                   <a:srgbClr val="333333"/>
                 </a:solidFill>
@@ -4147,22 +4487,8 @@
           <a:p>
             <a:pPr algn="l"/>
             <a:r>
-              <a:t>烧钱率：$150K/月</a:t>
-              <a:rPr sz="2000">
-                <a:solidFill>
-                  <a:srgbClr val="333333"/>
-                </a:solidFill>
-                <a:latin typeface="Helvetica Neue"/>
-                <a:ea typeface="PingFang SC"/>
-                <a:cs typeface="PingFang SC"/>
-              </a:rPr>
-            </a:r>
-          </a:p>
-          <a:p>
-            <a:pPr algn="l"/>
-            <a:r>
-              <a:t>Runway：18 个月（含本次融资）</a:t>
-              <a:rPr sz="2000">
+              <a:t>2027 Q4（预计）</a:t>
+              <a:rPr sz="1800">
                 <a:solidFill>
                   <a:srgbClr val="333333"/>
                 </a:solidFill>
